--- a/1학기/웹 프로그래밍/2026_웹 프로그래밍_part6.pptx
+++ b/1학기/웹 프로그래밍/2026_웹 프로그래밍_part6.pptx
@@ -2,7 +2,7 @@
 <file path=ppt/presentation.xml><?xml version="1.0" encoding="utf-8"?>
 <p:presentation xmlns:a="http://schemas.openxmlformats.org/drawingml/2006/main" xmlns:r="http://schemas.openxmlformats.org/officeDocument/2006/relationships" xmlns:p="http://schemas.openxmlformats.org/presentationml/2006/main" xmlns:p14="http://schemas.microsoft.com/office/powerpoint/2010/main" saveSubsetFonts="1">
   <p:sldMasterIdLst>
-    <p:sldMasterId id="2147483664" r:id="rId5"/>
+    <p:sldMasterId id="2147483667" r:id="rId5"/>
   </p:sldMasterIdLst>
   <p:notesMasterIdLst>
     <p:notesMasterId r:id="rId7"/>
@@ -124,12 +124,12 @@
   <p:extLst>
     <p:ext uri="{EFAFB233-063F-42B5-8137-9DF3F51BA10A}">
       <p15:sldGuideLst xmlns:p15="http://schemas.microsoft.com/office/powerpoint/2012/main">
-        <p15:guide id="1" orient="horz" pos="2159" userDrawn="0">
+        <p15:guide id="1" orient="horz" pos="2157" userDrawn="0">
           <p15:clr>
             <a:srgbClr val="A4A3A4"/>
           </p15:clr>
         </p15:guide>
-        <p15:guide id="2" pos="2879" userDrawn="0">
+        <p15:guide id="2" pos="2877" userDrawn="0">
           <p15:clr>
             <a:srgbClr val="A4A3A4"/>
           </p15:clr>
@@ -141,6 +141,32 @@
 </file>
 
 <file path=ppt/ink/ink1.xml><?xml version="1.0" encoding="utf-8"?>
+<inkml:ink xmlns:inkml="http://www.w3.org/2003/InkML">
+  <inkml:definitions>
+    <inkml:context xml:id="ctx0">
+      <inkml:inkSource xml:id="inkSrc0">
+        <inkml:traceFormat>
+          <inkml:channel name="X" type="integer" max="3200" units="cm"/>
+          <inkml:channel name="Y" type="integer" max="1080" units="cm"/>
+        </inkml:traceFormat>
+        <inkml:channelProperties>
+          <inkml:channelProperty channel="X" name="resolution" value="66.666656" units="1/cm"/>
+          <inkml:channelProperty channel="Y" name="resolution" value="40.000000" units="1/cm"/>
+        </inkml:channelProperties>
+      </inkml:inkSource>
+    </inkml:context>
+    <inkml:brush xml:id="br0">
+      <inkml:brushProperty name="width" value="0.035278" units="cm"/>
+      <inkml:brushProperty name="height" value="0.035278" units="cm"/>
+      <inkml:brushProperty name="color" value="#ff0000"/>
+      <inkml:brushProperty name="fitToCurve" value="1"/>
+    </inkml:brush>
+  </inkml:definitions>
+  <inkml:trace contextRef="#ctx0" brushRef="#br0">1066 377,'-22'22,"-178"178,66-66,23-1,-89 111,89-177,22-23,23 1,66-23,-67 0,23 23,22-45,44 0,0 0,0 0,23 0,43 22,24 0,21 0,-22-22,-67 0,1 0,-1 0,1 0,-1 0,0 0,-21 0,-23-22,0-45,0 1,0-23,0-22,0 0,-45-23,-21 23,43-22,-21 22,0-22,-23 66,45 45,-1-23,-21 1,0-23,-1 45,23 0,22 0,-44 0,21 22,23 22,-22 67,0 66,-45 45,67-67,0 23,0-1,22 45,23-22,-23-23,-22-66,0 0,45-22,-23-45,-22 0,22-22,-22 23,22-23,0 0,1 0,-1-45,0 1,-22-134,44 45,1-45,-23 22,0-21,23 21,-23 1,-22-1,0 156</inkml:trace>
+</inkml:ink>
+</file>
+
+<file path=ppt/ink/ink2.xml><?xml version="1.0" encoding="utf-8"?>
 <inkml:ink xmlns:inkml="http://www.w3.org/2003/InkML">
   <inkml:definitions>
     <inkml:context xml:id="ctx0">
@@ -3158,7 +3184,7 @@
 </file>
 
 <file path=ppt/slides/slide12.xml><?xml version="1.0" encoding="utf-8"?>
-<p:sld xmlns:a="http://schemas.openxmlformats.org/drawingml/2006/main" xmlns:r="http://schemas.openxmlformats.org/officeDocument/2006/relationships" xmlns:p="http://schemas.openxmlformats.org/presentationml/2006/main">
+<p:sld xmlns:a="http://schemas.openxmlformats.org/drawingml/2006/main" xmlns:r="http://schemas.openxmlformats.org/officeDocument/2006/relationships" xmlns:p="http://schemas.openxmlformats.org/presentationml/2006/main" xmlns:p14="http://schemas.microsoft.com/office/powerpoint/2010/main">
   <p:cSld>
     <p:spTree>
       <p:nvGrpSpPr>
@@ -3196,7 +3222,12 @@
             <p:ph type="title"/>
           </p:nvPr>
         </p:nvSpPr>
-        <p:spPr/>
+        <p:spPr>
+          <a:xfrm>
+            <a:off x="443230" y="146050"/>
+            <a:ext cx="7773035" cy="762635"/>
+          </a:xfrm>
+        </p:spPr>
         <p:txBody>
           <a:bodyPr/>
           <a:lstStyle/>
@@ -3244,7 +3275,12 @@
             <p:ph idx="1"/>
           </p:nvPr>
         </p:nvSpPr>
-        <p:spPr/>
+        <p:spPr>
+          <a:xfrm>
+            <a:off x="444500" y="1152525"/>
+            <a:ext cx="7773035" cy="5020310"/>
+          </a:xfrm>
+        </p:spPr>
         <p:txBody>
           <a:bodyPr>
             <a:normAutofit/>
@@ -3415,7 +3451,12 @@
             <p:ph type="sldNum" sz="quarter" idx="10"/>
           </p:nvPr>
         </p:nvSpPr>
-        <p:spPr/>
+        <p:spPr>
+          <a:xfrm>
+            <a:off x="7112000" y="6419850"/>
+            <a:ext cx="1905635" cy="305435"/>
+          </a:xfrm>
+        </p:spPr>
         <p:txBody>
           <a:bodyPr/>
           <a:lstStyle/>
@@ -3450,7 +3491,12 @@
             <p:ph type="ftr" sz="quarter" idx="11"/>
           </p:nvPr>
         </p:nvSpPr>
-        <p:spPr/>
+        <p:spPr>
+          <a:xfrm>
+            <a:off x="897255" y="6393180"/>
+            <a:ext cx="3110230" cy="349885"/>
+          </a:xfrm>
+        </p:spPr>
         <p:txBody>
           <a:bodyPr/>
           <a:lstStyle/>
@@ -3476,8 +3522,8 @@
         </p:nvSpPr>
         <p:spPr>
           <a:xfrm>
-            <a:off x="896938" y="1484784"/>
-            <a:ext cx="3786036" cy="523220"/>
+            <a:off x="897255" y="1484630"/>
+            <a:ext cx="3785870" cy="523240"/>
           </a:xfrm>
           <a:prstGeom prst="rect">
             <a:avLst/>
@@ -3508,6 +3554,54 @@
           </a:p>
         </p:txBody>
       </p:sp>
+      <p:sp>
+        <p:nvSpPr>
+          <p:cNvPr id="7" name="텍스트 상자 6"/>
+          <p:cNvSpPr txBox="1">
+            <a:spLocks/>
+          </p:cNvSpPr>
+          <p:nvPr/>
+        </p:nvSpPr>
+        <p:spPr>
+          <a:xfrm rot="0">
+            <a:off x="5526405" y="5334000"/>
+            <a:ext cx="796925" cy="370205"/>
+          </a:xfrm>
+          <a:prstGeom prst="rect"/>
+          <a:noFill/>
+          <a:ln>
+            <a:noFill/>
+            <a:prstDash/>
+          </a:ln>
+        </p:spPr>
+        <p:txBody>
+          <a:bodyPr wrap="none" lIns="89535" tIns="46355" rIns="89535" bIns="46355" vert="horz" anchor="t">
+            <a:spAutoFit/>
+          </a:bodyPr>
+          <a:lstStyle/>
+          <a:p>
+            <a:pPr marL="0" indent="0" algn="l" hangingPunct="1"/>
+            <a:r>
+              <a:rPr sz="1800">
+                <a:latin typeface="맑은 고딕" charset="0"/>
+                <a:ea typeface="맑은 고딕" charset="0"/>
+              </a:rPr>
+              <a:t>=</a:t>
+            </a:r>
+            <a:r>
+              <a:rPr sz="1800">
+                <a:latin typeface="맑은 고딕" charset="0"/>
+                <a:ea typeface="맑은 고딕" charset="0"/>
+              </a:rPr>
+              <a:t>거짓</a:t>
+            </a:r>
+            <a:endParaRPr lang="ko-KR" altLang="en-US" sz="1800">
+              <a:latin typeface="맑은 고딕" charset="0"/>
+              <a:ea typeface="맑은 고딕" charset="0"/>
+            </a:endParaRPr>
+          </a:p>
+        </p:txBody>
+      </p:sp>
     </p:spTree>
     <p:extLst>
       <p:ext uri="{BB962C8B-B14F-4D97-AF65-F5344CB8AC3E}">
@@ -3518,11 +3612,26 @@
   <p:clrMapOvr>
     <a:masterClrMapping/>
   </p:clrMapOvr>
+  <mc:AlternateContent xmlns:mc="http://schemas.openxmlformats.org/markup-compatibility/2006">
+    <mc:Choice xmlns:p14="http://schemas.microsoft.com/office/powerpoint/2010/main" Requires="p14">
+      <p:transition spd="slow" p14:dur="2000"/>
+    </mc:Choice>
+    <mc:Fallback>
+      <p:transition spd="slow"/>
+    </mc:Fallback>
+  </mc:AlternateContent>
+  <p:timing>
+    <p:tnLst>
+      <p:par>
+        <p:cTn id="1" dur="indefinite" restart="never" nodeType="tmRoot"/>
+      </p:par>
+    </p:tnLst>
+  </p:timing>
 </p:sld>
 </file>
 
 <file path=ppt/slides/slide13.xml><?xml version="1.0" encoding="utf-8"?>
-<p:sld xmlns:a="http://schemas.openxmlformats.org/drawingml/2006/main" xmlns:r="http://schemas.openxmlformats.org/officeDocument/2006/relationships" xmlns:p="http://schemas.openxmlformats.org/presentationml/2006/main">
+<p:sld xmlns:a="http://schemas.openxmlformats.org/drawingml/2006/main" xmlns:r="http://schemas.openxmlformats.org/officeDocument/2006/relationships" xmlns:p="http://schemas.openxmlformats.org/presentationml/2006/main" xmlns:p14="http://schemas.microsoft.com/office/powerpoint/2010/main">
   <p:cSld>
     <p:spTree>
       <p:nvGrpSpPr>
@@ -3554,7 +3663,12 @@
             <p:ph type="title"/>
           </p:nvPr>
         </p:nvSpPr>
-        <p:spPr/>
+        <p:spPr>
+          <a:xfrm>
+            <a:off x="443230" y="146050"/>
+            <a:ext cx="7773035" cy="762635"/>
+          </a:xfrm>
+        </p:spPr>
         <p:txBody>
           <a:bodyPr/>
           <a:lstStyle/>
@@ -3602,7 +3716,12 @@
             <p:ph idx="1"/>
           </p:nvPr>
         </p:nvSpPr>
-        <p:spPr/>
+        <p:spPr>
+          <a:xfrm>
+            <a:off x="444500" y="1152525"/>
+            <a:ext cx="7773035" cy="5020310"/>
+          </a:xfrm>
+        </p:spPr>
         <p:txBody>
           <a:bodyPr/>
           <a:lstStyle/>
@@ -3630,7 +3749,12 @@
             <p:ph type="sldNum" sz="quarter" idx="10"/>
           </p:nvPr>
         </p:nvSpPr>
-        <p:spPr/>
+        <p:spPr>
+          <a:xfrm>
+            <a:off x="7112000" y="6419850"/>
+            <a:ext cx="1905635" cy="305435"/>
+          </a:xfrm>
+        </p:spPr>
         <p:txBody>
           <a:bodyPr/>
           <a:lstStyle/>
@@ -3665,7 +3789,12 @@
             <p:ph type="ftr" sz="quarter" idx="11"/>
           </p:nvPr>
         </p:nvSpPr>
-        <p:spPr/>
+        <p:spPr>
+          <a:xfrm>
+            <a:off x="897255" y="6393180"/>
+            <a:ext cx="3110230" cy="349885"/>
+          </a:xfrm>
+        </p:spPr>
         <p:txBody>
           <a:bodyPr/>
           <a:lstStyle/>
@@ -3691,8 +3820,8 @@
         </p:nvSpPr>
         <p:spPr>
           <a:xfrm>
-            <a:off x="896938" y="1700808"/>
-            <a:ext cx="6057427" cy="2585323"/>
+            <a:off x="897255" y="1700530"/>
+            <a:ext cx="6057265" cy="2585085"/>
           </a:xfrm>
           <a:prstGeom prst="rect">
             <a:avLst/>
@@ -3875,6 +4004,68 @@
           </a:p>
         </p:txBody>
       </p:sp>
+      <p:sp>
+        <p:nvSpPr>
+          <p:cNvPr id="7" name="텍스트 상자 7"/>
+          <p:cNvSpPr txBox="1">
+            <a:spLocks/>
+          </p:cNvSpPr>
+          <p:nvPr/>
+        </p:nvSpPr>
+        <p:spPr>
+          <a:xfrm rot="0">
+            <a:off x="2607310" y="4918710"/>
+            <a:ext cx="3713480" cy="370205"/>
+          </a:xfrm>
+          <a:prstGeom prst="rect"/>
+          <a:noFill/>
+          <a:ln>
+            <a:noFill/>
+            <a:prstDash/>
+          </a:ln>
+        </p:spPr>
+        <p:txBody>
+          <a:bodyPr wrap="none" lIns="89535" tIns="46355" rIns="89535" bIns="46355" vert="horz" anchor="t">
+            <a:spAutoFit/>
+          </a:bodyPr>
+          <a:lstStyle/>
+          <a:p>
+            <a:pPr marL="0" indent="0" algn="l" hangingPunct="1"/>
+            <a:r>
+              <a:rPr lang="ko-KR" sz="1800">
+                <a:latin typeface="맑은 고딕" charset="0"/>
+                <a:ea typeface="맑은 고딕" charset="0"/>
+              </a:rPr>
+              <a:t>i</a:t>
+            </a:r>
+            <a:r>
+              <a:rPr lang="ko-KR" sz="1800">
+                <a:latin typeface="맑은 고딕" charset="0"/>
+                <a:ea typeface="맑은 고딕" charset="0"/>
+              </a:rPr>
+              <a:t>n</a:t>
+            </a:r>
+            <a:r>
+              <a:rPr lang="ko-KR" sz="1800">
+                <a:latin typeface="맑은 고딕" charset="0"/>
+                <a:ea typeface="맑은 고딕" charset="0"/>
+              </a:rPr>
+              <a:t>c</a:t>
+            </a:r>
+            <a:r>
+              <a:rPr lang="ko-KR" sz="1800">
+                <a:latin typeface="맑은 고딕" charset="0"/>
+                <a:ea typeface="맑은 고딕" charset="0"/>
+              </a:rPr>
+              <a:t>ludes대신 뭘 쓸 수 있나 이런식</a:t>
+            </a:r>
+            <a:endParaRPr lang="ko-KR" altLang="en-US" sz="1800">
+              <a:latin typeface="맑은 고딕" charset="0"/>
+              <a:ea typeface="맑은 고딕" charset="0"/>
+            </a:endParaRPr>
+          </a:p>
+        </p:txBody>
+      </p:sp>
     </p:spTree>
     <p:extLst>
       <p:ext uri="{BB962C8B-B14F-4D97-AF65-F5344CB8AC3E}">
@@ -3885,6 +4076,21 @@
   <p:clrMapOvr>
     <a:masterClrMapping/>
   </p:clrMapOvr>
+  <mc:AlternateContent xmlns:mc="http://schemas.openxmlformats.org/markup-compatibility/2006">
+    <mc:Choice xmlns:p14="http://schemas.microsoft.com/office/powerpoint/2010/main" Requires="p14">
+      <p:transition spd="slow" p14:dur="2000"/>
+    </mc:Choice>
+    <mc:Fallback>
+      <p:transition spd="slow"/>
+    </mc:Fallback>
+  </mc:AlternateContent>
+  <p:timing>
+    <p:tnLst>
+      <p:par>
+        <p:cTn id="1" dur="indefinite" restart="never" nodeType="tmRoot"/>
+      </p:par>
+    </p:tnLst>
+  </p:timing>
 </p:sld>
 </file>
 
@@ -7447,7 +7653,7 @@
 </file>
 
 <file path=ppt/slides/slide6.xml><?xml version="1.0" encoding="utf-8"?>
-<p:sld xmlns:a="http://schemas.openxmlformats.org/drawingml/2006/main" xmlns:r="http://schemas.openxmlformats.org/officeDocument/2006/relationships" xmlns:p="http://schemas.openxmlformats.org/presentationml/2006/main">
+<p:sld xmlns:a="http://schemas.openxmlformats.org/drawingml/2006/main" xmlns:r="http://schemas.openxmlformats.org/officeDocument/2006/relationships" xmlns:p="http://schemas.openxmlformats.org/presentationml/2006/main" xmlns:p14="http://schemas.microsoft.com/office/powerpoint/2010/main">
   <p:cSld>
     <p:spTree>
       <p:nvGrpSpPr>
@@ -7479,7 +7685,12 @@
             <p:ph type="title"/>
           </p:nvPr>
         </p:nvSpPr>
-        <p:spPr/>
+        <p:spPr>
+          <a:xfrm>
+            <a:off x="443230" y="146050"/>
+            <a:ext cx="7773035" cy="762635"/>
+          </a:xfrm>
+        </p:spPr>
         <p:txBody>
           <a:bodyPr/>
           <a:lstStyle/>
@@ -7525,7 +7736,7 @@
         <p:spPr>
           <a:xfrm>
             <a:off x="444500" y="1152525"/>
-            <a:ext cx="7772400" cy="3140571"/>
+            <a:ext cx="7772400" cy="3140710"/>
           </a:xfrm>
         </p:spPr>
         <p:txBody>
@@ -7643,7 +7854,12 @@
             <p:ph type="sldNum" sz="quarter" idx="10"/>
           </p:nvPr>
         </p:nvSpPr>
-        <p:spPr/>
+        <p:spPr>
+          <a:xfrm>
+            <a:off x="7112000" y="6419850"/>
+            <a:ext cx="1905635" cy="305435"/>
+          </a:xfrm>
+        </p:spPr>
         <p:txBody>
           <a:bodyPr/>
           <a:lstStyle/>
@@ -7678,7 +7894,12 @@
             <p:ph type="ftr" sz="quarter" idx="11"/>
           </p:nvPr>
         </p:nvSpPr>
-        <p:spPr/>
+        <p:spPr>
+          <a:xfrm>
+            <a:off x="897255" y="6393180"/>
+            <a:ext cx="3110230" cy="349885"/>
+          </a:xfrm>
+        </p:spPr>
         <p:txBody>
           <a:bodyPr/>
           <a:lstStyle/>
@@ -7704,8 +7925,8 @@
         </p:nvSpPr>
         <p:spPr>
           <a:xfrm>
-            <a:off x="839064" y="2708920"/>
-            <a:ext cx="6272936" cy="923330"/>
+            <a:off x="838835" y="2708910"/>
+            <a:ext cx="6273165" cy="923290"/>
           </a:xfrm>
           <a:prstGeom prst="rect">
             <a:avLst/>
@@ -7804,8 +8025,8 @@
         </p:nvSpPr>
         <p:spPr>
           <a:xfrm>
-            <a:off x="839064" y="4258826"/>
-            <a:ext cx="3397981" cy="1477328"/>
+            <a:off x="838835" y="4258945"/>
+            <a:ext cx="3397885" cy="1477645"/>
           </a:xfrm>
           <a:prstGeom prst="rect">
             <a:avLst/>
@@ -7881,6 +8102,45 @@
           </a:p>
         </p:txBody>
       </p:sp>
+      <mc:AlternateContent xmlns:mc="http://schemas.openxmlformats.org/markup-compatibility/2006" xmlns:p14="http://schemas.microsoft.com/office/powerpoint/2010/main">
+        <mc:Choice Requires="p14">
+          <p:contentPart p14:bwMode="auto" r:id="rId1">
+            <p14:nvContentPartPr>
+              <p14:cNvPr id="8" name="잉크 1"/>
+              <p14:cNvContentPartPr/>
+              <p14:nvPr/>
+            </p14:nvContentPartPr>
+            <p14:xfrm>
+              <a:off x="5110480" y="4470400"/>
+              <a:ext cx="384175" cy="631825"/>
+            </p14:xfrm>
+          </p:contentPart>
+        </mc:Choice>
+        <mc:Fallback>
+          <p:pic>
+            <p:nvPicPr>
+              <p:cNvPr id="8" name="잉크 1"/>
+              <p:cNvPicPr/>
+              <p:nvPr/>
+            </p:nvPicPr>
+            <p:blipFill>
+              <a:blip r:embed="rId2"/>
+              <a:stretch>
+                <a:fillRect/>
+              </a:stretch>
+            </p:blipFill>
+            <p:spPr>
+              <a:xfrm>
+                <a:off x="5110480" y="4470400"/>
+                <a:ext cx="384175" cy="631825"/>
+              </a:xfrm>
+              <a:prstGeom prst="rect">
+                <a:avLst/>
+              </a:prstGeom>
+            </p:spPr>
+          </p:pic>
+        </mc:Fallback>
+      </mc:AlternateContent>
     </p:spTree>
     <p:extLst>
       <p:ext uri="{BB962C8B-B14F-4D97-AF65-F5344CB8AC3E}">
@@ -7891,6 +8151,21 @@
   <p:clrMapOvr>
     <a:masterClrMapping/>
   </p:clrMapOvr>
+  <mc:AlternateContent xmlns:mc="http://schemas.openxmlformats.org/markup-compatibility/2006">
+    <mc:Choice xmlns:p14="http://schemas.microsoft.com/office/powerpoint/2010/main" Requires="p14">
+      <p:transition spd="slow" p14:dur="2000"/>
+    </mc:Choice>
+    <mc:Fallback>
+      <p:transition spd="slow"/>
+    </mc:Fallback>
+  </mc:AlternateContent>
+  <p:timing>
+    <p:tnLst>
+      <p:par>
+        <p:cTn id="1" dur="indefinite" restart="never" nodeType="tmRoot"/>
+      </p:par>
+    </p:tnLst>
+  </p:timing>
 </p:sld>
 </file>
 
